--- a/test-corpus/word-verification/wardley.pptx
+++ b/test-corpus/word-verification/wardley.pptx
@@ -144,8 +144,8 @@
         </p:nvSpPr>
         <p:spPr>
           <a:xfrm>
-            <a:off x="1899047" y="1079063"/>
-            <a:ext cx="8393906" cy="125909"/>
+            <a:off x="457200" y="1505828"/>
+            <a:ext cx="7034784" cy="105522"/>
           </a:xfrm>
           <a:prstGeom prst="rect">
             <a:avLst/>
@@ -168,7 +168,7 @@
               </a:spcAft>
             </a:pPr>
             <a:r>
-              <a:rPr lang="en-US" b="1" sz="950" dirty="0">
+              <a:rPr lang="en-US" b="1" sz="800" dirty="0">
                 <a:solidFill>
                   <a:srgbClr val="000000"/>
                 </a:solidFill>
@@ -186,13 +186,13 @@
         </p:nvCxnSpPr>
         <p:spPr>
           <a:xfrm>
-            <a:off x="2301955" y="5997893"/>
-            <a:ext cx="7588091" cy="1"/>
+            <a:off x="794870" y="5628211"/>
+            <a:ext cx="6359444" cy="1"/>
           </a:xfrm>
           <a:prstGeom prst="line">
             <a:avLst/>
           </a:prstGeom>
-          <a:ln w="8394">
+          <a:ln w="7035">
             <a:solidFill>
               <a:srgbClr val="000000"/>
             </a:solidFill>
@@ -208,13 +208,13 @@
         </p:nvCxnSpPr>
         <p:spPr>
           <a:xfrm>
-            <a:off x="2301955" y="1532334"/>
-            <a:ext cx="1" cy="4465559"/>
+            <a:off x="794870" y="1885706"/>
+            <a:ext cx="1" cy="3742505"/>
           </a:xfrm>
           <a:prstGeom prst="line">
             <a:avLst/>
           </a:prstGeom>
-          <a:ln w="8394">
+          <a:ln w="7035">
             <a:solidFill>
               <a:srgbClr val="000000"/>
             </a:solidFill>
@@ -230,8 +230,8 @@
         </p:nvSpPr>
         <p:spPr>
           <a:xfrm>
-            <a:off x="2301955" y="1330881"/>
-            <a:ext cx="1007269" cy="125909"/>
+            <a:off x="794870" y="1716871"/>
+            <a:ext cx="844174" cy="105522"/>
           </a:xfrm>
           <a:prstGeom prst="rect">
             <a:avLst/>
@@ -242,7 +242,7 @@
           </a:ln>
         </p:spPr>
         <p:txBody>
-          <a:bodyPr wrap="none" lIns="16788" tIns="0" rIns="16788" bIns="0" anchor="ctr"/>
+          <a:bodyPr wrap="none" lIns="14070" tIns="0" rIns="14070" bIns="0" anchor="ctr"/>
           <a:lstStyle/>
           <a:p>
             <a:pPr algn="l">
@@ -254,7 +254,7 @@
               </a:spcAft>
             </a:pPr>
             <a:r>
-              <a:rPr lang="en-US" b="1" sz="900" dirty="0">
+              <a:rPr lang="en-US" b="1" sz="750" dirty="0">
                 <a:solidFill>
                   <a:srgbClr val="000000"/>
                 </a:solidFill>
@@ -272,8 +272,8 @@
         </p:nvSpPr>
         <p:spPr>
           <a:xfrm>
-            <a:off x="2301955" y="6199346"/>
-            <a:ext cx="7588091" cy="125909"/>
+            <a:off x="794870" y="5797046"/>
+            <a:ext cx="6359445" cy="105522"/>
           </a:xfrm>
           <a:prstGeom prst="rect">
             <a:avLst/>
@@ -296,7 +296,7 @@
               </a:spcAft>
             </a:pPr>
             <a:r>
-              <a:rPr lang="en-US" b="1" sz="900" dirty="0">
+              <a:rPr lang="en-US" b="1" sz="750" dirty="0">
                 <a:solidFill>
                   <a:srgbClr val="000000"/>
                 </a:solidFill>
@@ -314,8 +314,8 @@
         </p:nvSpPr>
         <p:spPr>
           <a:xfrm>
-            <a:off x="2301955" y="6031468"/>
-            <a:ext cx="1897023" cy="125909"/>
+            <a:off x="794870" y="5656350"/>
+            <a:ext cx="1589861" cy="105522"/>
           </a:xfrm>
           <a:prstGeom prst="rect">
             <a:avLst/>
@@ -338,7 +338,7 @@
               </a:spcAft>
             </a:pPr>
             <a:r>
-              <a:rPr lang="en-US" sz="800" dirty="0">
+              <a:rPr lang="en-US" sz="650" dirty="0">
                 <a:solidFill>
                   <a:srgbClr val="000000"/>
                 </a:solidFill>
@@ -356,13 +356,13 @@
         </p:nvCxnSpPr>
         <p:spPr>
           <a:xfrm>
-            <a:off x="4198977" y="1532334"/>
-            <a:ext cx="1" cy="4465559"/>
+            <a:off x="2384731" y="1885706"/>
+            <a:ext cx="1" cy="3742505"/>
           </a:xfrm>
           <a:prstGeom prst="line">
             <a:avLst/>
           </a:prstGeom>
-          <a:ln w="8394">
+          <a:ln w="7035">
             <a:solidFill>
               <a:srgbClr val="808080"/>
             </a:solidFill>
@@ -378,8 +378,8 @@
         </p:nvSpPr>
         <p:spPr>
           <a:xfrm>
-            <a:off x="4198977" y="6031468"/>
-            <a:ext cx="1897023" cy="125909"/>
+            <a:off x="2384731" y="5656350"/>
+            <a:ext cx="1589861" cy="105522"/>
           </a:xfrm>
           <a:prstGeom prst="rect">
             <a:avLst/>
@@ -402,7 +402,7 @@
               </a:spcAft>
             </a:pPr>
             <a:r>
-              <a:rPr lang="en-US" sz="800" dirty="0">
+              <a:rPr lang="en-US" sz="650" dirty="0">
                 <a:solidFill>
                   <a:srgbClr val="000000"/>
                 </a:solidFill>
@@ -420,13 +420,13 @@
         </p:nvCxnSpPr>
         <p:spPr>
           <a:xfrm>
-            <a:off x="6096000" y="1532334"/>
-            <a:ext cx="1" cy="4465559"/>
+            <a:off x="3974592" y="1885706"/>
+            <a:ext cx="1" cy="3742505"/>
           </a:xfrm>
           <a:prstGeom prst="line">
             <a:avLst/>
           </a:prstGeom>
-          <a:ln w="8394">
+          <a:ln w="7035">
             <a:solidFill>
               <a:srgbClr val="808080"/>
             </a:solidFill>
@@ -442,8 +442,8 @@
         </p:nvSpPr>
         <p:spPr>
           <a:xfrm>
-            <a:off x="6096000" y="6031468"/>
-            <a:ext cx="1897023" cy="125909"/>
+            <a:off x="3974592" y="5656350"/>
+            <a:ext cx="1589861" cy="105522"/>
           </a:xfrm>
           <a:prstGeom prst="rect">
             <a:avLst/>
@@ -466,7 +466,7 @@
               </a:spcAft>
             </a:pPr>
             <a:r>
-              <a:rPr lang="en-US" sz="800" dirty="0">
+              <a:rPr lang="en-US" sz="650" dirty="0">
                 <a:solidFill>
                   <a:srgbClr val="000000"/>
                 </a:solidFill>
@@ -484,13 +484,13 @@
         </p:nvCxnSpPr>
         <p:spPr>
           <a:xfrm>
-            <a:off x="7993023" y="1532334"/>
-            <a:ext cx="1" cy="4465559"/>
+            <a:off x="5564453" y="1885706"/>
+            <a:ext cx="1" cy="3742505"/>
           </a:xfrm>
           <a:prstGeom prst="line">
             <a:avLst/>
           </a:prstGeom>
-          <a:ln w="8394">
+          <a:ln w="7035">
             <a:solidFill>
               <a:srgbClr val="808080"/>
             </a:solidFill>
@@ -506,8 +506,8 @@
         </p:nvSpPr>
         <p:spPr>
           <a:xfrm>
-            <a:off x="7993023" y="6031468"/>
-            <a:ext cx="1897023" cy="125909"/>
+            <a:off x="5564453" y="5656350"/>
+            <a:ext cx="1589861" cy="105522"/>
           </a:xfrm>
           <a:prstGeom prst="rect">
             <a:avLst/>
@@ -530,7 +530,7 @@
               </a:spcAft>
             </a:pPr>
             <a:r>
-              <a:rPr lang="en-US" sz="800" dirty="0">
+              <a:rPr lang="en-US" sz="650" dirty="0">
                 <a:solidFill>
                   <a:srgbClr val="000000"/>
                 </a:solidFill>
@@ -548,8 +548,8 @@
         </p:nvSpPr>
         <p:spPr>
           <a:xfrm>
-            <a:off x="5666568" y="3976976"/>
-            <a:ext cx="1617674" cy="201454"/>
+            <a:off x="3614692" y="3934517"/>
+            <a:ext cx="1355744" cy="168835"/>
           </a:xfrm>
           <a:prstGeom prst="roundRect">
             <a:avLst/>
@@ -570,13 +570,13 @@
         </p:nvCxnSpPr>
         <p:spPr>
           <a:xfrm>
-            <a:off x="5792476" y="4077703"/>
-            <a:ext cx="1365857" cy="1"/>
+            <a:off x="3720214" y="4018934"/>
+            <a:ext cx="1144700" cy="1"/>
           </a:xfrm>
           <a:prstGeom prst="line">
             <a:avLst/>
           </a:prstGeom>
-          <a:ln w="8394">
+          <a:ln w="7035">
             <a:solidFill>
               <a:srgbClr val="000000"/>
             </a:solidFill>
@@ -592,13 +592,13 @@
         </p:nvCxnSpPr>
         <p:spPr>
           <a:xfrm flipH="1">
-            <a:off x="6941154" y="1804877"/>
-            <a:ext cx="130834" cy="615960"/>
+            <a:off x="4682901" y="2114119"/>
+            <a:ext cx="109649" cy="516226"/>
           </a:xfrm>
           <a:prstGeom prst="line">
             <a:avLst/>
           </a:prstGeom>
-          <a:ln w="8394">
+          <a:ln w="7035">
             <a:solidFill>
               <a:srgbClr val="000000"/>
             </a:solidFill>
@@ -614,13 +614,13 @@
         </p:nvCxnSpPr>
         <p:spPr>
           <a:xfrm flipH="1">
-            <a:off x="6974747" y="1780014"/>
-            <a:ext cx="1201862" cy="665685"/>
+            <a:off x="4711054" y="2093282"/>
+            <a:ext cx="1007259" cy="557899"/>
           </a:xfrm>
           <a:prstGeom prst="line">
             <a:avLst/>
           </a:prstGeom>
-          <a:ln w="8394">
+          <a:ln w="7035">
             <a:solidFill>
               <a:srgbClr val="000000"/>
             </a:solidFill>
@@ -636,13 +636,13 @@
         </p:nvCxnSpPr>
         <p:spPr>
           <a:xfrm>
-            <a:off x="6980001" y="2480344"/>
-            <a:ext cx="1191354" cy="247449"/>
+            <a:off x="4715458" y="2680216"/>
+            <a:ext cx="998452" cy="207383"/>
           </a:xfrm>
           <a:prstGeom prst="line">
             <a:avLst/>
           </a:prstGeom>
-          <a:ln w="8394">
+          <a:ln w="7035">
             <a:solidFill>
               <a:srgbClr val="000000"/>
             </a:solidFill>
@@ -658,13 +658,13 @@
         </p:nvCxnSpPr>
         <p:spPr>
           <a:xfrm>
-            <a:off x="6976256" y="2491554"/>
-            <a:ext cx="1426486" cy="671585"/>
+            <a:off x="4712319" y="2689611"/>
+            <a:ext cx="1195513" cy="562843"/>
           </a:xfrm>
           <a:prstGeom prst="line">
             <a:avLst/>
           </a:prstGeom>
-          <a:ln w="8394">
+          <a:ln w="7035">
             <a:solidFill>
               <a:srgbClr val="000000"/>
             </a:solidFill>
@@ -680,13 +680,13 @@
         </p:nvCxnSpPr>
         <p:spPr>
           <a:xfrm>
-            <a:off x="6969324" y="2502411"/>
-            <a:ext cx="1364469" cy="1141082"/>
+            <a:off x="4706510" y="2698710"/>
+            <a:ext cx="1143537" cy="956321"/>
           </a:xfrm>
           <a:prstGeom prst="line">
             <a:avLst/>
           </a:prstGeom>
-          <a:ln w="8394">
+          <a:ln w="7035">
             <a:solidFill>
               <a:srgbClr val="000000"/>
             </a:solidFill>
@@ -702,13 +702,13 @@
         </p:nvCxnSpPr>
         <p:spPr>
           <a:xfrm>
-            <a:off x="8384308" y="3724744"/>
-            <a:ext cx="128001" cy="527294"/>
+            <a:off x="5892382" y="3723126"/>
+            <a:ext cx="107275" cy="441916"/>
           </a:xfrm>
           <a:prstGeom prst="line">
             <a:avLst/>
           </a:prstGeom>
-          <a:ln w="8394">
+          <a:ln w="7035">
             <a:solidFill>
               <a:srgbClr val="000000"/>
             </a:solidFill>
@@ -724,13 +724,13 @@
         </p:nvCxnSpPr>
         <p:spPr>
           <a:xfrm flipH="1">
-            <a:off x="6531672" y="3683355"/>
-            <a:ext cx="1790962" cy="271656"/>
+            <a:off x="4339721" y="3688438"/>
+            <a:ext cx="1500973" cy="227670"/>
           </a:xfrm>
           <a:prstGeom prst="line">
             <a:avLst/>
           </a:prstGeom>
-          <a:ln w="8394">
+          <a:ln w="7035">
             <a:solidFill>
               <a:srgbClr val="000000"/>
             </a:solidFill>
@@ -746,8 +746,8 @@
         </p:nvSpPr>
         <p:spPr>
           <a:xfrm>
-            <a:off x="7277020" y="3843906"/>
-            <a:ext cx="318968" cy="125909"/>
+            <a:off x="4964384" y="3822993"/>
+            <a:ext cx="267322" cy="105522"/>
           </a:xfrm>
           <a:prstGeom prst="rect">
             <a:avLst/>
@@ -770,7 +770,7 @@
               </a:spcAft>
             </a:pPr>
             <a:r>
-              <a:rPr lang="en-US" sz="700" dirty="0">
+              <a:rPr lang="en-US" sz="600" dirty="0">
                 <a:solidFill>
                   <a:srgbClr val="000000"/>
                 </a:solidFill>
@@ -788,13 +788,13 @@
         </p:nvCxnSpPr>
         <p:spPr>
           <a:xfrm>
-            <a:off x="6508562" y="4009799"/>
-            <a:ext cx="1075714" cy="1500605"/>
+            <a:off x="4320353" y="3962025"/>
+            <a:ext cx="901536" cy="1257631"/>
           </a:xfrm>
           <a:prstGeom prst="line">
             <a:avLst/>
           </a:prstGeom>
-          <a:ln w="8394">
+          <a:ln w="7035">
             <a:solidFill>
               <a:srgbClr val="000000"/>
             </a:solidFill>
@@ -810,13 +810,13 @@
         </p:nvCxnSpPr>
         <p:spPr>
           <a:xfrm>
-            <a:off x="3868596" y="4669765"/>
-            <a:ext cx="3695999" cy="870032"/>
+            <a:off x="2107844" y="4515131"/>
+            <a:ext cx="3097551" cy="729158"/>
           </a:xfrm>
           <a:prstGeom prst="line">
             <a:avLst/>
           </a:prstGeom>
-          <a:ln w="8394">
+          <a:ln w="7035">
             <a:solidFill>
               <a:srgbClr val="000000"/>
             </a:solidFill>
@@ -832,13 +832,13 @@
         </p:nvCxnSpPr>
         <p:spPr>
           <a:xfrm>
-            <a:off x="8451724" y="3234838"/>
-            <a:ext cx="69050" cy="1015895"/>
+            <a:off x="5948882" y="3312544"/>
+            <a:ext cx="57870" cy="851404"/>
           </a:xfrm>
           <a:prstGeom prst="line">
             <a:avLst/>
           </a:prstGeom>
-          <a:ln w="8394">
+          <a:ln w="7035">
             <a:solidFill>
               <a:srgbClr val="000000"/>
             </a:solidFill>
@@ -856,13 +856,13 @@
         </p:nvCxnSpPr>
         <p:spPr>
           <a:xfrm>
-            <a:off x="6525768" y="3963545"/>
-            <a:ext cx="480803" cy="1"/>
+            <a:off x="4334773" y="3923261"/>
+            <a:ext cx="402952" cy="1"/>
           </a:xfrm>
           <a:prstGeom prst="line">
             <a:avLst/>
           </a:prstGeom>
-          <a:ln w="8394">
+          <a:ln w="7035">
             <a:solidFill>
               <a:srgbClr val="DC3545"/>
             </a:solidFill>
@@ -879,8 +879,8 @@
         </p:nvSpPr>
         <p:spPr>
           <a:xfrm>
-            <a:off x="7032089" y="1705249"/>
-            <a:ext cx="100727" cy="100727"/>
+            <a:off x="4759111" y="2030623"/>
+            <a:ext cx="84417" cy="84417"/>
           </a:xfrm>
           <a:prstGeom prst="ellipse">
             <a:avLst/>
@@ -903,8 +903,8 @@
         </p:nvSpPr>
         <p:spPr>
           <a:xfrm>
-            <a:off x="7183179" y="1587734"/>
-            <a:ext cx="612755" cy="125909"/>
+            <a:off x="4885737" y="1932136"/>
+            <a:ext cx="513539" cy="105522"/>
           </a:xfrm>
           <a:prstGeom prst="rect">
             <a:avLst/>
@@ -915,7 +915,7 @@
           </a:ln>
         </p:spPr>
         <p:txBody>
-          <a:bodyPr wrap="none" lIns="16788" tIns="0" rIns="16788" bIns="0" anchor="ctr"/>
+          <a:bodyPr wrap="none" lIns="14070" tIns="0" rIns="14070" bIns="0" anchor="ctr"/>
           <a:lstStyle/>
           <a:p>
             <a:pPr algn="l">
@@ -927,7 +927,7 @@
               </a:spcAft>
             </a:pPr>
             <a:r>
-              <a:rPr lang="en-US" b="1" sz="800" dirty="0">
+              <a:rPr lang="en-US" b="1" sz="650" dirty="0">
                 <a:solidFill>
                   <a:srgbClr val="000000"/>
                 </a:solidFill>
@@ -945,8 +945,8 @@
         </p:nvSpPr>
         <p:spPr>
           <a:xfrm>
-            <a:off x="8170302" y="1705249"/>
-            <a:ext cx="100727" cy="100727"/>
+            <a:off x="5713028" y="2030623"/>
+            <a:ext cx="84417" cy="84417"/>
           </a:xfrm>
           <a:prstGeom prst="ellipse">
             <a:avLst/>
@@ -969,8 +969,8 @@
         </p:nvSpPr>
         <p:spPr>
           <a:xfrm>
-            <a:off x="8321393" y="1587734"/>
-            <a:ext cx="478453" cy="125909"/>
+            <a:off x="5839654" y="1932136"/>
+            <a:ext cx="400983" cy="105522"/>
           </a:xfrm>
           <a:prstGeom prst="rect">
             <a:avLst/>
@@ -981,7 +981,7 @@
           </a:ln>
         </p:spPr>
         <p:txBody>
-          <a:bodyPr wrap="none" lIns="16788" tIns="0" rIns="16788" bIns="0" anchor="ctr"/>
+          <a:bodyPr wrap="none" lIns="14070" tIns="0" rIns="14070" bIns="0" anchor="ctr"/>
           <a:lstStyle/>
           <a:p>
             <a:pPr algn="l">
@@ -993,7 +993,7 @@
               </a:spcAft>
             </a:pPr>
             <a:r>
-              <a:rPr lang="en-US" b="1" sz="800" dirty="0">
+              <a:rPr lang="en-US" b="1" sz="650" dirty="0">
                 <a:solidFill>
                   <a:srgbClr val="000000"/>
                 </a:solidFill>
@@ -1011,8 +1011,8 @@
         </p:nvSpPr>
         <p:spPr>
           <a:xfrm>
-            <a:off x="6880327" y="2419738"/>
-            <a:ext cx="100727" cy="100727"/>
+            <a:off x="4631922" y="2629423"/>
+            <a:ext cx="84417" cy="84417"/>
           </a:xfrm>
           <a:prstGeom prst="ellipse">
             <a:avLst/>
@@ -1035,8 +1035,8 @@
         </p:nvSpPr>
         <p:spPr>
           <a:xfrm>
-            <a:off x="6317935" y="2486889"/>
-            <a:ext cx="587573" cy="125909"/>
+            <a:off x="4160592" y="2685702"/>
+            <a:ext cx="492435" cy="105522"/>
           </a:xfrm>
           <a:prstGeom prst="rect">
             <a:avLst/>
@@ -1047,7 +1047,7 @@
           </a:ln>
         </p:spPr>
         <p:txBody>
-          <a:bodyPr wrap="none" lIns="16788" tIns="0" rIns="16788" bIns="0" anchor="ctr"/>
+          <a:bodyPr wrap="none" lIns="14070" tIns="0" rIns="14070" bIns="0" anchor="ctr"/>
           <a:lstStyle/>
           <a:p>
             <a:pPr algn="l">
@@ -1059,7 +1059,7 @@
               </a:spcAft>
             </a:pPr>
             <a:r>
-              <a:rPr lang="en-US" sz="800" dirty="0">
+              <a:rPr lang="en-US" sz="650" dirty="0">
                 <a:solidFill>
                   <a:srgbClr val="000000"/>
                 </a:solidFill>
@@ -1077,8 +1077,8 @@
         </p:nvSpPr>
         <p:spPr>
           <a:xfrm>
-            <a:off x="8170302" y="2687672"/>
-            <a:ext cx="100727" cy="100727"/>
+            <a:off x="5713028" y="2853974"/>
+            <a:ext cx="84417" cy="84417"/>
           </a:xfrm>
           <a:prstGeom prst="ellipse">
             <a:avLst/>
@@ -1101,8 +1101,8 @@
         </p:nvSpPr>
         <p:spPr>
           <a:xfrm>
-            <a:off x="8321393" y="2670884"/>
-            <a:ext cx="243423" cy="125909"/>
+            <a:off x="5839654" y="2839904"/>
+            <a:ext cx="204009" cy="105522"/>
           </a:xfrm>
           <a:prstGeom prst="rect">
             <a:avLst/>
@@ -1113,7 +1113,7 @@
           </a:ln>
         </p:spPr>
         <p:txBody>
-          <a:bodyPr wrap="none" lIns="16788" tIns="0" rIns="16788" bIns="0" anchor="ctr"/>
+          <a:bodyPr wrap="none" lIns="14070" tIns="0" rIns="14070" bIns="0" anchor="ctr"/>
           <a:lstStyle/>
           <a:p>
             <a:pPr algn="l">
@@ -1125,7 +1125,7 @@
               </a:spcAft>
             </a:pPr>
             <a:r>
-              <a:rPr lang="en-US" sz="800" dirty="0">
+              <a:rPr lang="en-US" sz="650" dirty="0">
                 <a:solidFill>
                   <a:srgbClr val="000000"/>
                 </a:solidFill>
@@ -1143,8 +1143,8 @@
         </p:nvSpPr>
         <p:spPr>
           <a:xfrm>
-            <a:off x="8397945" y="3134227"/>
-            <a:ext cx="100727" cy="100727"/>
+            <a:off x="5903811" y="3228224"/>
+            <a:ext cx="84417" cy="84417"/>
           </a:xfrm>
           <a:prstGeom prst="ellipse">
             <a:avLst/>
@@ -1167,8 +1167,8 @@
         </p:nvSpPr>
         <p:spPr>
           <a:xfrm>
-            <a:off x="8549035" y="3117440"/>
-            <a:ext cx="243423" cy="125909"/>
+            <a:off x="6030437" y="3214155"/>
+            <a:ext cx="204009" cy="105522"/>
           </a:xfrm>
           <a:prstGeom prst="rect">
             <a:avLst/>
@@ -1179,7 +1179,7 @@
           </a:ln>
         </p:spPr>
         <p:txBody>
-          <a:bodyPr wrap="none" lIns="16788" tIns="0" rIns="16788" bIns="0" anchor="ctr"/>
+          <a:bodyPr wrap="none" lIns="14070" tIns="0" rIns="14070" bIns="0" anchor="ctr"/>
           <a:lstStyle/>
           <a:p>
             <a:pPr algn="l">
@@ -1191,7 +1191,7 @@
               </a:spcAft>
             </a:pPr>
             <a:r>
-              <a:rPr lang="en-US" sz="800" dirty="0">
+              <a:rPr lang="en-US" sz="650" dirty="0">
                 <a:solidFill>
                   <a:srgbClr val="000000"/>
                 </a:solidFill>
@@ -1209,8 +1209,8 @@
         </p:nvSpPr>
         <p:spPr>
           <a:xfrm>
-            <a:off x="8322064" y="3625439"/>
-            <a:ext cx="100727" cy="100727"/>
+            <a:off x="5840217" y="3639900"/>
+            <a:ext cx="84417" cy="84417"/>
           </a:xfrm>
           <a:prstGeom prst="ellipse">
             <a:avLst/>
@@ -1233,8 +1233,8 @@
         </p:nvSpPr>
         <p:spPr>
           <a:xfrm>
-            <a:off x="8473154" y="3608651"/>
-            <a:ext cx="562392" cy="125909"/>
+            <a:off x="5966843" y="3625830"/>
+            <a:ext cx="471331" cy="105522"/>
           </a:xfrm>
           <a:prstGeom prst="rect">
             <a:avLst/>
@@ -1245,7 +1245,7 @@
           </a:ln>
         </p:spPr>
         <p:txBody>
-          <a:bodyPr wrap="none" lIns="16788" tIns="0" rIns="16788" bIns="0" anchor="ctr"/>
+          <a:bodyPr wrap="none" lIns="14070" tIns="0" rIns="14070" bIns="0" anchor="ctr"/>
           <a:lstStyle/>
           <a:p>
             <a:pPr algn="l">
@@ -1257,7 +1257,7 @@
               </a:spcAft>
             </a:pPr>
             <a:r>
-              <a:rPr lang="en-US" sz="800" dirty="0">
+              <a:rPr lang="en-US" sz="650" dirty="0">
                 <a:solidFill>
                   <a:srgbClr val="000000"/>
                 </a:solidFill>
@@ -1275,8 +1275,8 @@
         </p:nvSpPr>
         <p:spPr>
           <a:xfrm>
-            <a:off x="8458717" y="4235508"/>
-            <a:ext cx="130945" cy="130945"/>
+            <a:off x="5954743" y="4151188"/>
+            <a:ext cx="109743" cy="109743"/>
           </a:xfrm>
           <a:prstGeom prst="diamond">
             <a:avLst/>
@@ -1299,8 +1299,8 @@
         </p:nvSpPr>
         <p:spPr>
           <a:xfrm>
-            <a:off x="8624916" y="4233829"/>
-            <a:ext cx="360938" cy="125909"/>
+            <a:off x="6094032" y="4149781"/>
+            <a:ext cx="302496" cy="105522"/>
           </a:xfrm>
           <a:prstGeom prst="rect">
             <a:avLst/>
@@ -1311,7 +1311,7 @@
           </a:ln>
         </p:spPr>
         <p:txBody>
-          <a:bodyPr wrap="none" lIns="16788" tIns="0" rIns="16788" bIns="0" anchor="ctr"/>
+          <a:bodyPr wrap="none" lIns="14070" tIns="0" rIns="14070" bIns="0" anchor="ctr"/>
           <a:lstStyle/>
           <a:p>
             <a:pPr algn="l">
@@ -1323,7 +1323,7 @@
               </a:spcAft>
             </a:pPr>
             <a:r>
-              <a:rPr lang="en-US" sz="800" dirty="0">
+              <a:rPr lang="en-US" sz="650" dirty="0">
                 <a:solidFill>
                   <a:srgbClr val="000000"/>
                 </a:solidFill>
@@ -1341,8 +1341,8 @@
         </p:nvSpPr>
         <p:spPr>
           <a:xfrm>
-            <a:off x="6435114" y="3923255"/>
-            <a:ext cx="80582" cy="80582"/>
+            <a:off x="4258797" y="3889494"/>
+            <a:ext cx="67534" cy="67534"/>
           </a:xfrm>
           <a:prstGeom prst="rect">
             <a:avLst/>
@@ -1365,13 +1365,13 @@
         </p:nvCxnSpPr>
         <p:spPr>
           <a:xfrm>
-            <a:off x="6559344" y="3913182"/>
-            <a:ext cx="1" cy="100727"/>
+            <a:off x="4362912" y="3881052"/>
+            <a:ext cx="1" cy="84418"/>
           </a:xfrm>
           <a:prstGeom prst="line">
             <a:avLst/>
           </a:prstGeom>
-          <a:ln w="8394">
+          <a:ln w="7035">
             <a:solidFill>
               <a:srgbClr val="000000"/>
             </a:solidFill>
@@ -1387,8 +1387,8 @@
         </p:nvSpPr>
         <p:spPr>
           <a:xfrm>
-            <a:off x="6576132" y="3896394"/>
-            <a:ext cx="411301" cy="125909"/>
+            <a:off x="4376982" y="3866983"/>
+            <a:ext cx="344704" cy="105522"/>
           </a:xfrm>
           <a:prstGeom prst="rect">
             <a:avLst/>
@@ -1399,7 +1399,7 @@
           </a:ln>
         </p:spPr>
         <p:txBody>
-          <a:bodyPr wrap="none" lIns="16788" tIns="0" rIns="16788" bIns="0" anchor="ctr"/>
+          <a:bodyPr wrap="none" lIns="14070" tIns="0" rIns="14070" bIns="0" anchor="ctr"/>
           <a:lstStyle/>
           <a:p>
             <a:pPr algn="l">
@@ -1411,7 +1411,7 @@
               </a:spcAft>
             </a:pPr>
             <a:r>
-              <a:rPr lang="en-US" sz="800" dirty="0">
+              <a:rPr lang="en-US" sz="650" dirty="0">
                 <a:solidFill>
                   <a:srgbClr val="000000"/>
                 </a:solidFill>
@@ -1429,8 +1429,8 @@
         </p:nvSpPr>
         <p:spPr>
           <a:xfrm>
-            <a:off x="3754100" y="4592753"/>
-            <a:ext cx="130945" cy="115836"/>
+            <a:off x="2011887" y="4450588"/>
+            <a:ext cx="109743" cy="97080"/>
           </a:xfrm>
           <a:custGeom>
             <a:avLst/>
@@ -1439,15 +1439,15 @@
             <a:cxnLst/>
             <a:rect l="0" t="0" r="0" b="0"/>
             <a:pathLst>
-              <a:path w="130945" h="115836">
+              <a:path w="109743" h="97080">
                 <a:moveTo>
-                  <a:pt x="65473" y="0"/>
+                  <a:pt x="54872" y="0"/>
                 </a:moveTo>
                 <a:lnTo>
-                  <a:pt x="130945" y="115836"/>
+                  <a:pt x="109743" y="97080"/>
                 </a:lnTo>
                 <a:lnTo>
-                  <a:pt x="0" y="115836"/>
+                  <a:pt x="0" y="97080"/>
                 </a:lnTo>
                 <a:close/>
               </a:path>
@@ -1458,7 +1458,7 @@
               <a:alpha val="100000"/>
             </a:srgbClr>
           </a:solidFill>
-          <a:ln w="8394">
+          <a:ln w="7035">
             <a:solidFill>
               <a:srgbClr val="000000"/>
             </a:solidFill>
@@ -1473,8 +1473,8 @@
         </p:nvSpPr>
         <p:spPr>
           <a:xfrm>
-            <a:off x="3920300" y="4591074"/>
-            <a:ext cx="411301" cy="125909"/>
+            <a:off x="2151176" y="4449181"/>
+            <a:ext cx="344704" cy="105522"/>
           </a:xfrm>
           <a:prstGeom prst="rect">
             <a:avLst/>
@@ -1485,7 +1485,7 @@
           </a:ln>
         </p:spPr>
         <p:txBody>
-          <a:bodyPr wrap="none" lIns="16788" tIns="0" rIns="16788" bIns="0" anchor="ctr"/>
+          <a:bodyPr wrap="none" lIns="14070" tIns="0" rIns="14070" bIns="0" anchor="ctr"/>
           <a:lstStyle/>
           <a:p>
             <a:pPr algn="l">
@@ -1497,7 +1497,7 @@
               </a:spcAft>
             </a:pPr>
             <a:r>
-              <a:rPr lang="en-US" sz="800" dirty="0">
+              <a:rPr lang="en-US" sz="650" dirty="0">
                 <a:solidFill>
                   <a:srgbClr val="000000"/>
                 </a:solidFill>
@@ -1515,8 +1515,8 @@
         </p:nvSpPr>
         <p:spPr>
           <a:xfrm>
-            <a:off x="7563255" y="5500973"/>
-            <a:ext cx="100727" cy="100727"/>
+            <a:off x="5204272" y="5211752"/>
+            <a:ext cx="84417" cy="84417"/>
           </a:xfrm>
           <a:prstGeom prst="rect">
             <a:avLst/>
@@ -1539,8 +1539,8 @@
         </p:nvSpPr>
         <p:spPr>
           <a:xfrm>
-            <a:off x="7714345" y="5484185"/>
-            <a:ext cx="360938" cy="125909"/>
+            <a:off x="5330898" y="5197682"/>
+            <a:ext cx="302496" cy="105522"/>
           </a:xfrm>
           <a:prstGeom prst="rect">
             <a:avLst/>
@@ -1551,7 +1551,7 @@
           </a:ln>
         </p:spPr>
         <p:txBody>
-          <a:bodyPr wrap="none" lIns="16788" tIns="0" rIns="16788" bIns="0" anchor="ctr"/>
+          <a:bodyPr wrap="none" lIns="14070" tIns="0" rIns="14070" bIns="0" anchor="ctr"/>
           <a:lstStyle/>
           <a:p>
             <a:pPr algn="l">
@@ -1563,7 +1563,7 @@
               </a:spcAft>
             </a:pPr>
             <a:r>
-              <a:rPr lang="en-US" sz="800" dirty="0">
+              <a:rPr lang="en-US" sz="650" dirty="0">
                 <a:solidFill>
                   <a:srgbClr val="000000"/>
                 </a:solidFill>
@@ -1581,8 +1581,8 @@
         </p:nvSpPr>
         <p:spPr>
           <a:xfrm>
-            <a:off x="7107969" y="4027339"/>
-            <a:ext cx="100727" cy="100727"/>
+            <a:off x="4822706" y="3976725"/>
+            <a:ext cx="84417" cy="84417"/>
           </a:xfrm>
           <a:prstGeom prst="ellipse">
             <a:avLst/>
@@ -1605,8 +1605,8 @@
         </p:nvSpPr>
         <p:spPr>
           <a:xfrm>
-            <a:off x="7259060" y="4010551"/>
-            <a:ext cx="889754" cy="125909"/>
+            <a:off x="4949332" y="3962656"/>
+            <a:ext cx="745687" cy="105522"/>
           </a:xfrm>
           <a:prstGeom prst="rect">
             <a:avLst/>
@@ -1617,7 +1617,7 @@
           </a:ln>
         </p:spPr>
         <p:txBody>
-          <a:bodyPr wrap="none" lIns="16788" tIns="0" rIns="16788" bIns="0" anchor="ctr"/>
+          <a:bodyPr wrap="none" lIns="14070" tIns="0" rIns="14070" bIns="0" anchor="ctr"/>
           <a:lstStyle/>
           <a:p>
             <a:pPr algn="l">
@@ -1629,7 +1629,7 @@
               </a:spcAft>
             </a:pPr>
             <a:r>
-              <a:rPr lang="en-US" sz="800" dirty="0">
+              <a:rPr lang="en-US" sz="650" dirty="0">
                 <a:solidFill>
                   <a:srgbClr val="000000"/>
                 </a:solidFill>
@@ -1647,8 +1647,8 @@
         </p:nvSpPr>
         <p:spPr>
           <a:xfrm>
-            <a:off x="5742113" y="4027339"/>
-            <a:ext cx="100727" cy="100727"/>
+            <a:off x="3678006" y="3976725"/>
+            <a:ext cx="84417" cy="84417"/>
           </a:xfrm>
           <a:prstGeom prst="ellipse">
             <a:avLst/>
@@ -1671,8 +1671,8 @@
         </p:nvSpPr>
         <p:spPr>
           <a:xfrm>
-            <a:off x="5893203" y="4010551"/>
-            <a:ext cx="612755" cy="125909"/>
+            <a:off x="3804632" y="3962656"/>
+            <a:ext cx="513539" cy="105522"/>
           </a:xfrm>
           <a:prstGeom prst="rect">
             <a:avLst/>
@@ -1683,7 +1683,7 @@
           </a:ln>
         </p:spPr>
         <p:txBody>
-          <a:bodyPr wrap="none" lIns="16788" tIns="0" rIns="16788" bIns="0" anchor="ctr"/>
+          <a:bodyPr wrap="none" lIns="14070" tIns="0" rIns="14070" bIns="0" anchor="ctr"/>
           <a:lstStyle/>
           <a:p>
             <a:pPr algn="l">
@@ -1695,7 +1695,7 @@
               </a:spcAft>
             </a:pPr>
             <a:r>
-              <a:rPr lang="en-US" sz="800" dirty="0">
+              <a:rPr lang="en-US" sz="650" dirty="0">
                 <a:solidFill>
                   <a:srgbClr val="000000"/>
                 </a:solidFill>
@@ -1713,8 +1713,8 @@
         </p:nvSpPr>
         <p:spPr>
           <a:xfrm>
-            <a:off x="5716596" y="5618152"/>
-            <a:ext cx="2753201" cy="125909"/>
+            <a:off x="3656620" y="5309957"/>
+            <a:ext cx="2307409" cy="105522"/>
           </a:xfrm>
           <a:prstGeom prst="rect">
             <a:avLst/>
@@ -1725,7 +1725,7 @@
           </a:ln>
         </p:spPr>
         <p:txBody>
-          <a:bodyPr wrap="none" lIns="16788" tIns="0" rIns="16788" bIns="0" anchor="ctr"/>
+          <a:bodyPr wrap="none" lIns="14070" tIns="0" rIns="14070" bIns="0" anchor="ctr"/>
           <a:lstStyle/>
           <a:p>
             <a:pPr algn="l">
@@ -1737,7 +1737,7 @@
               </a:spcAft>
             </a:pPr>
             <a:r>
-              <a:rPr lang="en-US" i="1" sz="800" dirty="0">
+              <a:rPr lang="en-US" i="1" sz="650" dirty="0">
                 <a:solidFill>
                   <a:srgbClr val="595959"/>
                 </a:solidFill>
@@ -1755,13 +1755,13 @@
         </p:nvCxnSpPr>
         <p:spPr>
           <a:xfrm>
-            <a:off x="4393716" y="3229246"/>
-            <a:ext cx="369332" cy="1"/>
+            <a:off x="2547938" y="3307858"/>
+            <a:ext cx="309530" cy="1"/>
           </a:xfrm>
           <a:prstGeom prst="line">
             <a:avLst/>
           </a:prstGeom>
-          <a:ln w="8394">
+          <a:ln w="7035">
             <a:solidFill>
               <a:srgbClr val="DC3545"/>
             </a:solidFill>
@@ -1778,8 +1778,8 @@
         </p:nvSpPr>
         <p:spPr>
           <a:xfrm>
-            <a:off x="4242626" y="3279610"/>
-            <a:ext cx="671513" cy="125909"/>
+            <a:off x="2421312" y="3350067"/>
+            <a:ext cx="562783" cy="105522"/>
           </a:xfrm>
           <a:prstGeom prst="rect">
             <a:avLst/>
@@ -1802,7 +1802,7 @@
               </a:spcAft>
             </a:pPr>
             <a:r>
-              <a:rPr lang="en-US" sz="700" dirty="0">
+              <a:rPr lang="en-US" sz="600" dirty="0">
                 <a:solidFill>
                   <a:srgbClr val="000000"/>
                 </a:solidFill>
@@ -1820,8 +1820,8 @@
         </p:nvSpPr>
         <p:spPr>
           <a:xfrm>
-            <a:off x="4511231" y="5037630"/>
-            <a:ext cx="134303" cy="134303"/>
+            <a:off x="2646425" y="4823432"/>
+            <a:ext cx="112557" cy="112557"/>
           </a:xfrm>
           <a:prstGeom prst="ellipse">
             <a:avLst/>
@@ -1844,8 +1844,8 @@
         </p:nvSpPr>
         <p:spPr>
           <a:xfrm>
-            <a:off x="4511231" y="5037630"/>
-            <a:ext cx="134303" cy="125909"/>
+            <a:off x="2646425" y="4823432"/>
+            <a:ext cx="112557" cy="105522"/>
           </a:xfrm>
           <a:prstGeom prst="rect">
             <a:avLst/>
@@ -1868,7 +1868,7 @@
               </a:spcAft>
             </a:pPr>
             <a:r>
-              <a:rPr lang="en-US" b="1" sz="700" dirty="0">
+              <a:rPr lang="en-US" b="1" sz="600" dirty="0">
                 <a:solidFill>
                   <a:srgbClr val="000000"/>
                 </a:solidFill>
@@ -1886,8 +1886,8 @@
         </p:nvSpPr>
         <p:spPr>
           <a:xfrm>
-            <a:off x="2453716" y="5462026"/>
-            <a:ext cx="1309449" cy="193060"/>
+            <a:off x="922059" y="5179111"/>
+            <a:ext cx="1097426" cy="161800"/>
           </a:xfrm>
           <a:prstGeom prst="rect">
             <a:avLst/>
@@ -1910,8 +1910,8 @@
         </p:nvSpPr>
         <p:spPr>
           <a:xfrm>
-            <a:off x="2487292" y="5495601"/>
-            <a:ext cx="1242298" cy="125909"/>
+            <a:off x="950198" y="5207250"/>
+            <a:ext cx="1041148" cy="105522"/>
           </a:xfrm>
           <a:prstGeom prst="rect">
             <a:avLst/>
@@ -1922,7 +1922,7 @@
           </a:ln>
         </p:spPr>
         <p:txBody>
-          <a:bodyPr wrap="none" lIns="16788" tIns="0" rIns="16788" bIns="0" anchor="ctr"/>
+          <a:bodyPr wrap="none" lIns="14070" tIns="0" rIns="14070" bIns="0" anchor="ctr"/>
           <a:lstStyle/>
           <a:p>
             <a:pPr algn="l">
@@ -1934,12 +1934,458 @@
               </a:spcAft>
             </a:pPr>
             <a:r>
-              <a:rPr lang="en-US" sz="800" dirty="0">
+              <a:rPr lang="en-US" sz="650" dirty="0">
                 <a:solidFill>
                   <a:srgbClr val="000000"/>
                 </a:solidFill>
               </a:rPr>
               <a:t>1. Standardising power</a:t>
+            </a:r>
+          </a:p>
+        </p:txBody>
+      </p:sp>
+      <p:sp>
+        <p:nvSpPr>
+          <p:cNvPr id="4" name="Mermaid source"/>
+          <p:cNvSpPr/>
+          <p:nvPr/>
+        </p:nvSpPr>
+        <p:spPr>
+          <a:xfrm>
+            <a:off x="7674864" y="1028700"/>
+            <a:ext cx="4059936" cy="5372100"/>
+          </a:xfrm>
+          <a:prstGeom prst="rect">
+            <a:avLst/>
+          </a:prstGeom>
+          <a:solidFill>
+            <a:srgbClr val="F3F4F6"/>
+          </a:solidFill>
+          <a:ln w="9525">
+            <a:solidFill>
+              <a:srgbClr val="D1D5DB"/>
+            </a:solidFill>
+          </a:ln>
+        </p:spPr>
+        <p:txBody>
+          <a:bodyPr wrap="square" lIns="91440" tIns="45720" rIns="91440" bIns="45720" anchor="t">
+            <a:noAutofit/>
+          </a:bodyPr>
+          <a:lstStyle/>
+          <a:p>
+            <a:pPr algn="l"/>
+            <a:r>
+              <a:rPr lang="en-US" sz="1000" dirty="0">
+                <a:solidFill>
+                  <a:srgbClr val="1F2937"/>
+                </a:solidFill>
+                <a:latin typeface="Consolas"/>
+                <a:cs typeface="Consolas"/>
+              </a:rPr>
+              <a:t>wardley-beta</a:t>
+            </a:r>
+          </a:p>
+          <a:p>
+            <a:pPr algn="l"/>
+            <a:r>
+              <a:rPr lang="en-US" sz="1000" dirty="0">
+                <a:solidFill>
+                  <a:srgbClr val="1F2937"/>
+                </a:solidFill>
+                <a:latin typeface="Consolas"/>
+                <a:cs typeface="Consolas"/>
+              </a:rPr>
+              <a:t>title Tea Shop</a:t>
+            </a:r>
+          </a:p>
+          <a:p>
+            <a:pPr algn="l"/>
+            <a:r>
+              <a:rPr lang="en-US" sz="1000" dirty="0">
+                <a:solidFill>
+                  <a:srgbClr val="1F2937"/>
+                </a:solidFill>
+                <a:latin typeface="Consolas"/>
+                <a:cs typeface="Consolas"/>
+              </a:rPr>
+              <a:t>size [1000, 640]</a:t>
+            </a:r>
+          </a:p>
+          <a:p>
+            <a:pPr algn="l"/>
+            <a:r>
+              <a:rPr lang="en-US" sz="1000" dirty="0">
+                <a:solidFill>
+                  <a:srgbClr val="1F2937"/>
+                </a:solidFill>
+                <a:latin typeface="Consolas"/>
+                <a:cs typeface="Consolas"/>
+              </a:rPr>
+              <a:t>anchor Business [0.95, 0.63]</a:t>
+            </a:r>
+          </a:p>
+          <a:p>
+            <a:pPr algn="l"/>
+            <a:r>
+              <a:rPr lang="en-US" sz="1000" dirty="0">
+                <a:solidFill>
+                  <a:srgbClr val="1F2937"/>
+                </a:solidFill>
+                <a:latin typeface="Consolas"/>
+                <a:cs typeface="Consolas"/>
+              </a:rPr>
+              <a:t>anchor Public [0.95, 0.78]</a:t>
+            </a:r>
+          </a:p>
+          <a:p>
+            <a:pPr algn="l"/>
+            <a:r>
+              <a:rPr lang="en-US" sz="1000" dirty="0">
+                <a:solidFill>
+                  <a:srgbClr val="1F2937"/>
+                </a:solidFill>
+                <a:latin typeface="Consolas"/>
+                <a:cs typeface="Consolas"/>
+              </a:rPr>
+              <a:t>component Cup of Tea [0.79, 0.61] label [-85, 10]</a:t>
+            </a:r>
+          </a:p>
+          <a:p>
+            <a:pPr algn="l"/>
+            <a:r>
+              <a:rPr lang="en-US" sz="1000" dirty="0">
+                <a:solidFill>
+                  <a:srgbClr val="1F2937"/>
+                </a:solidFill>
+                <a:latin typeface="Consolas"/>
+                <a:cs typeface="Consolas"/>
+              </a:rPr>
+              <a:t>component Cup [0.73, 0.78]</a:t>
+            </a:r>
+          </a:p>
+          <a:p>
+            <a:pPr algn="l"/>
+            <a:r>
+              <a:rPr lang="en-US" sz="1000" dirty="0">
+                <a:solidFill>
+                  <a:srgbClr val="1F2937"/>
+                </a:solidFill>
+                <a:latin typeface="Consolas"/>
+                <a:cs typeface="Consolas"/>
+              </a:rPr>
+              <a:t>component Tea [0.63, 0.81]</a:t>
+            </a:r>
+          </a:p>
+          <a:p>
+            <a:pPr algn="l"/>
+            <a:r>
+              <a:rPr lang="en-US" sz="1000" dirty="0">
+                <a:solidFill>
+                  <a:srgbClr val="1F2937"/>
+                </a:solidFill>
+                <a:latin typeface="Consolas"/>
+                <a:cs typeface="Consolas"/>
+              </a:rPr>
+              <a:t>component Hot Water [0.52, 0.80]</a:t>
+            </a:r>
+          </a:p>
+          <a:p>
+            <a:pPr algn="l"/>
+            <a:r>
+              <a:rPr lang="en-US" sz="1000" dirty="0">
+                <a:solidFill>
+                  <a:srgbClr val="1F2937"/>
+                </a:solidFill>
+                <a:latin typeface="Consolas"/>
+                <a:cs typeface="Consolas"/>
+              </a:rPr>
+              <a:t>component Water [0.38, 0.82] (buy)</a:t>
+            </a:r>
+          </a:p>
+          <a:p>
+            <a:pPr algn="l"/>
+            <a:r>
+              <a:rPr lang="en-US" sz="1000" dirty="0">
+                <a:solidFill>
+                  <a:srgbClr val="1F2937"/>
+                </a:solidFill>
+                <a:latin typeface="Consolas"/>
+                <a:cs typeface="Consolas"/>
+              </a:rPr>
+              <a:t>component Kettle [0.43, 0.35] (inertia)</a:t>
+            </a:r>
+          </a:p>
+          <a:p>
+            <a:pPr algn="l"/>
+            <a:r>
+              <a:rPr lang="en-US" sz="1000" dirty="0">
+                <a:solidFill>
+                  <a:srgbClr val="1F2937"/>
+                </a:solidFill>
+                <a:latin typeface="Consolas"/>
+                <a:cs typeface="Consolas"/>
+              </a:rPr>
+              <a:t>component Boiler [0.30, 0.20] (build)</a:t>
+            </a:r>
+          </a:p>
+          <a:p>
+            <a:pPr algn="l"/>
+            <a:r>
+              <a:rPr lang="en-US" sz="1000" dirty="0">
+                <a:solidFill>
+                  <a:srgbClr val="1F2937"/>
+                </a:solidFill>
+                <a:latin typeface="Consolas"/>
+                <a:cs typeface="Consolas"/>
+              </a:rPr>
+              <a:t>component Power [0.1, 0.7] (outsource)</a:t>
+            </a:r>
+          </a:p>
+          <a:p>
+            <a:pPr algn="l"/>
+            <a:r>
+              <a:rPr lang="en-US" sz="1000" dirty="0">
+                <a:solidFill>
+                  <a:srgbClr val="1F2937"/>
+                </a:solidFill>
+                <a:latin typeface="Consolas"/>
+                <a:cs typeface="Consolas"/>
+              </a:rPr>
+              <a:t>pipeline Kettle {</a:t>
+            </a:r>
+          </a:p>
+          <a:p>
+            <a:pPr algn="l"/>
+            <a:r>
+              <a:rPr lang="en-US" sz="1000" dirty="0">
+                <a:solidFill>
+                  <a:srgbClr val="1F2937"/>
+                </a:solidFill>
+                <a:latin typeface="Consolas"/>
+                <a:cs typeface="Consolas"/>
+              </a:rPr>
+              <a:t>  component "Electric Kettle" [0.64]</a:t>
+            </a:r>
+          </a:p>
+          <a:p>
+            <a:pPr algn="l"/>
+            <a:r>
+              <a:rPr lang="en-US" sz="1000" dirty="0">
+                <a:solidFill>
+                  <a:srgbClr val="1F2937"/>
+                </a:solidFill>
+                <a:latin typeface="Consolas"/>
+                <a:cs typeface="Consolas"/>
+              </a:rPr>
+              <a:t>  component "Gas Kettle" [0.46]</a:t>
+            </a:r>
+          </a:p>
+          <a:p>
+            <a:pPr algn="l"/>
+            <a:r>
+              <a:rPr lang="en-US" sz="1000" dirty="0">
+                <a:solidFill>
+                  <a:srgbClr val="1F2937"/>
+                </a:solidFill>
+                <a:latin typeface="Consolas"/>
+                <a:cs typeface="Consolas"/>
+              </a:rPr>
+              <a:t>}</a:t>
+            </a:r>
+          </a:p>
+          <a:p>
+            <a:pPr algn="l"/>
+            <a:r>
+              <a:rPr lang="en-US" sz="1000" dirty="0">
+                <a:solidFill>
+                  <a:srgbClr val="1F2937"/>
+                </a:solidFill>
+                <a:latin typeface="Consolas"/>
+                <a:cs typeface="Consolas"/>
+              </a:rPr>
+              <a:t>Business-&gt;Cup of Tea</a:t>
+            </a:r>
+          </a:p>
+          <a:p>
+            <a:pPr algn="l"/>
+            <a:r>
+              <a:rPr lang="en-US" sz="1000" dirty="0">
+                <a:solidFill>
+                  <a:srgbClr val="1F2937"/>
+                </a:solidFill>
+                <a:latin typeface="Consolas"/>
+                <a:cs typeface="Consolas"/>
+              </a:rPr>
+              <a:t>Public-&gt;Cup of Tea</a:t>
+            </a:r>
+          </a:p>
+          <a:p>
+            <a:pPr algn="l"/>
+            <a:r>
+              <a:rPr lang="en-US" sz="1000" dirty="0">
+                <a:solidFill>
+                  <a:srgbClr val="1F2937"/>
+                </a:solidFill>
+                <a:latin typeface="Consolas"/>
+                <a:cs typeface="Consolas"/>
+              </a:rPr>
+              <a:t>Cup of Tea-&gt;Cup</a:t>
+            </a:r>
+          </a:p>
+          <a:p>
+            <a:pPr algn="l"/>
+            <a:r>
+              <a:rPr lang="en-US" sz="1000" dirty="0">
+                <a:solidFill>
+                  <a:srgbClr val="1F2937"/>
+                </a:solidFill>
+                <a:latin typeface="Consolas"/>
+                <a:cs typeface="Consolas"/>
+              </a:rPr>
+              <a:t>Cup of Tea-&gt;Tea</a:t>
+            </a:r>
+          </a:p>
+          <a:p>
+            <a:pPr algn="l"/>
+            <a:r>
+              <a:rPr lang="en-US" sz="1000" dirty="0">
+                <a:solidFill>
+                  <a:srgbClr val="1F2937"/>
+                </a:solidFill>
+                <a:latin typeface="Consolas"/>
+                <a:cs typeface="Consolas"/>
+              </a:rPr>
+              <a:t>Cup of Tea-&gt;Hot Water</a:t>
+            </a:r>
+          </a:p>
+          <a:p>
+            <a:pPr algn="l"/>
+            <a:r>
+              <a:rPr lang="en-US" sz="1000" dirty="0">
+                <a:solidFill>
+                  <a:srgbClr val="1F2937"/>
+                </a:solidFill>
+                <a:latin typeface="Consolas"/>
+                <a:cs typeface="Consolas"/>
+              </a:rPr>
+              <a:t>Hot Water-&gt;Water</a:t>
+            </a:r>
+          </a:p>
+          <a:p>
+            <a:pPr algn="l"/>
+            <a:r>
+              <a:rPr lang="en-US" sz="1000" dirty="0">
+                <a:solidFill>
+                  <a:srgbClr val="1F2937"/>
+                </a:solidFill>
+                <a:latin typeface="Consolas"/>
+                <a:cs typeface="Consolas"/>
+              </a:rPr>
+              <a:t>Hot Water-&gt;Kettle; boils</a:t>
+            </a:r>
+          </a:p>
+          <a:p>
+            <a:pPr algn="l"/>
+            <a:r>
+              <a:rPr lang="en-US" sz="1000" dirty="0">
+                <a:solidFill>
+                  <a:srgbClr val="1F2937"/>
+                </a:solidFill>
+                <a:latin typeface="Consolas"/>
+                <a:cs typeface="Consolas"/>
+              </a:rPr>
+              <a:t>Kettle -.-&gt; Power</a:t>
+            </a:r>
+          </a:p>
+          <a:p>
+            <a:pPr algn="l"/>
+            <a:r>
+              <a:rPr lang="en-US" sz="1000" dirty="0">
+                <a:solidFill>
+                  <a:srgbClr val="1F2937"/>
+                </a:solidFill>
+                <a:latin typeface="Consolas"/>
+                <a:cs typeface="Consolas"/>
+              </a:rPr>
+              <a:t>Boiler -&gt; Power</a:t>
+            </a:r>
+          </a:p>
+          <a:p>
+            <a:pPr algn="l"/>
+            <a:r>
+              <a:rPr lang="en-US" sz="1000" dirty="0">
+                <a:solidFill>
+                  <a:srgbClr val="1F2937"/>
+                </a:solidFill>
+                <a:latin typeface="Consolas"/>
+                <a:cs typeface="Consolas"/>
+              </a:rPr>
+              <a:t>Tea +&lt;&gt; Water</a:t>
+            </a:r>
+          </a:p>
+          <a:p>
+            <a:pPr algn="l"/>
+            <a:r>
+              <a:rPr lang="en-US" sz="1000" dirty="0">
+                <a:solidFill>
+                  <a:srgbClr val="1F2937"/>
+                </a:solidFill>
+                <a:latin typeface="Consolas"/>
+                <a:cs typeface="Consolas"/>
+              </a:rPr>
+              <a:t>evolve Kettle 0.62</a:t>
+            </a:r>
+          </a:p>
+          <a:p>
+            <a:pPr algn="l"/>
+            <a:r>
+              <a:rPr lang="en-US" sz="1000" dirty="0">
+                <a:solidFill>
+                  <a:srgbClr val="1F2937"/>
+                </a:solidFill>
+                <a:latin typeface="Consolas"/>
+                <a:cs typeface="Consolas"/>
+              </a:rPr>
+              <a:t>note "Standardising power allows Kettles to evolve faster" [0.07, 0.45]</a:t>
+            </a:r>
+          </a:p>
+          <a:p>
+            <a:pPr algn="l"/>
+            <a:r>
+              <a:rPr lang="en-US" sz="1000" dirty="0">
+                <a:solidFill>
+                  <a:srgbClr val="1F2937"/>
+                </a:solidFill>
+                <a:latin typeface="Consolas"/>
+                <a:cs typeface="Consolas"/>
+              </a:rPr>
+              <a:t>annotations [0.12, 0.02]</a:t>
+            </a:r>
+          </a:p>
+          <a:p>
+            <a:pPr algn="l"/>
+            <a:r>
+              <a:rPr lang="en-US" sz="1000" dirty="0">
+                <a:solidFill>
+                  <a:srgbClr val="1F2937"/>
+                </a:solidFill>
+                <a:latin typeface="Consolas"/>
+                <a:cs typeface="Consolas"/>
+              </a:rPr>
+              <a:t>annotation 1,[0.20,0.30] "Standardising power"</a:t>
+            </a:r>
+          </a:p>
+          <a:p>
+            <a:pPr algn="l"/>
+            <a:r>
+              <a:rPr lang="en-US" sz="1000" dirty="0">
+                <a:solidFill>
+                  <a:srgbClr val="1F2937"/>
+                </a:solidFill>
+                <a:latin typeface="Consolas"/>
+                <a:cs typeface="Consolas"/>
+              </a:rPr>
+              <a:t>accelerator "Open Source" [0.62, 0.30]</a:t>
             </a:r>
           </a:p>
         </p:txBody>
